--- a/statistics_12_History.pptx
+++ b/statistics_12_History.pptx
@@ -14213,8 +14213,8 @@
         </p:nvSpPr>
         <p:spPr>
           <a:xfrm>
-            <a:off x="2913321" y="1828800"/>
-            <a:ext cx="6813614" cy="1077218"/>
+            <a:off x="1596189" y="2425565"/>
+            <a:ext cx="8999621" cy="1938992"/>
           </a:xfrm>
           <a:prstGeom prst="rect">
             <a:avLst/>
@@ -14229,7 +14229,7 @@
           <a:p>
             <a:pPr algn="ctr"/>
             <a:r>
-              <a:rPr lang="en-US" sz="3200" b="1" dirty="0">
+              <a:rPr lang="en-US" sz="6000" b="1" dirty="0">
                 <a:solidFill>
                   <a:srgbClr val="0070C0"/>
                 </a:solidFill>
@@ -14240,7 +14240,7 @@
           <a:p>
             <a:pPr algn="ctr"/>
             <a:r>
-              <a:rPr lang="en-US" sz="3200" b="1" dirty="0">
+              <a:rPr lang="en-US" sz="6000" b="1" dirty="0">
                 <a:solidFill>
                   <a:srgbClr val="0070C0"/>
                 </a:solidFill>
@@ -17350,7 +17350,24 @@
                 <a:latin typeface="Calibri" panose="020F0502020204030204" pitchFamily="34" charset="0"/>
                 <a:cs typeface="Calibri" panose="020F0502020204030204" pitchFamily="34" charset="0"/>
               </a:rPr>
-              <a:t>Famous for t-distribution and t-test. Learned statistics math methods at Pearson's lab. Used pseudonym "Student" because he was working for </a:t>
+              <a:t>Famous for t-distribution and t-test. Learned statistics math methods at Pearson's lab. Used pseudonym "</a:t>
+            </a:r>
+            <a:r>
+              <a:rPr lang="en-US" sz="1600" b="1" dirty="0">
+                <a:solidFill>
+                  <a:srgbClr val="00B050"/>
+                </a:solidFill>
+                <a:latin typeface="Calibri" panose="020F0502020204030204" pitchFamily="34" charset="0"/>
+                <a:cs typeface="Calibri" panose="020F0502020204030204" pitchFamily="34" charset="0"/>
+              </a:rPr>
+              <a:t>Student</a:t>
+            </a:r>
+            <a:r>
+              <a:rPr lang="en-US" sz="1600" dirty="0">
+                <a:latin typeface="Calibri" panose="020F0502020204030204" pitchFamily="34" charset="0"/>
+                <a:cs typeface="Calibri" panose="020F0502020204030204" pitchFamily="34" charset="0"/>
+              </a:rPr>
+              <a:t>" because he was working for </a:t>
             </a:r>
             <a:r>
               <a:rPr lang="en-US" sz="1600" b="1" dirty="0">
